--- a/test-corpus/word-verification/packet.pptx
+++ b/test-corpus/word-verification/packet.pptx
@@ -144,7 +144,7 @@
         </p:nvSpPr>
         <p:spPr>
           <a:xfrm>
-            <a:off x="3145128" y="1142195"/>
+            <a:off x="1023720" y="1142195"/>
             <a:ext cx="5901744" cy="378317"/>
           </a:xfrm>
           <a:prstGeom prst="rect">
@@ -186,7 +186,7 @@
         </p:nvSpPr>
         <p:spPr>
           <a:xfrm>
-            <a:off x="3372118" y="1634007"/>
+            <a:off x="1250710" y="1634007"/>
             <a:ext cx="2723882" cy="151327"/>
           </a:xfrm>
           <a:prstGeom prst="rect">
@@ -228,7 +228,7 @@
         </p:nvSpPr>
         <p:spPr>
           <a:xfrm>
-            <a:off x="3372118" y="1634007"/>
+            <a:off x="1250710" y="1634007"/>
             <a:ext cx="2723882" cy="151327"/>
           </a:xfrm>
           <a:prstGeom prst="rect">
@@ -270,7 +270,7 @@
         </p:nvSpPr>
         <p:spPr>
           <a:xfrm>
-            <a:off x="3372118" y="1785334"/>
+            <a:off x="1250710" y="1785334"/>
             <a:ext cx="2723882" cy="340485"/>
           </a:xfrm>
           <a:prstGeom prst="rect">
@@ -316,7 +316,7 @@
         </p:nvSpPr>
         <p:spPr>
           <a:xfrm>
-            <a:off x="6096000" y="1634007"/>
+            <a:off x="3974592" y="1634007"/>
             <a:ext cx="2723882" cy="151327"/>
           </a:xfrm>
           <a:prstGeom prst="rect">
@@ -358,7 +358,7 @@
         </p:nvSpPr>
         <p:spPr>
           <a:xfrm>
-            <a:off x="6096000" y="1634007"/>
+            <a:off x="3974592" y="1634007"/>
             <a:ext cx="2723882" cy="151327"/>
           </a:xfrm>
           <a:prstGeom prst="rect">
@@ -400,7 +400,7 @@
         </p:nvSpPr>
         <p:spPr>
           <a:xfrm>
-            <a:off x="6096000" y="1785334"/>
+            <a:off x="3974592" y="1785334"/>
             <a:ext cx="2723882" cy="340485"/>
           </a:xfrm>
           <a:prstGeom prst="rect">
@@ -446,7 +446,7 @@
         </p:nvSpPr>
         <p:spPr>
           <a:xfrm>
-            <a:off x="3372118" y="2201482"/>
+            <a:off x="1250710" y="2201482"/>
             <a:ext cx="5447763" cy="151327"/>
           </a:xfrm>
           <a:prstGeom prst="rect">
@@ -488,7 +488,7 @@
         </p:nvSpPr>
         <p:spPr>
           <a:xfrm>
-            <a:off x="3372118" y="2201482"/>
+            <a:off x="1250710" y="2201482"/>
             <a:ext cx="5447763" cy="151327"/>
           </a:xfrm>
           <a:prstGeom prst="rect">
@@ -530,7 +530,7 @@
         </p:nvSpPr>
         <p:spPr>
           <a:xfrm>
-            <a:off x="3372118" y="2352809"/>
+            <a:off x="1250710" y="2352809"/>
             <a:ext cx="5447763" cy="340485"/>
           </a:xfrm>
           <a:prstGeom prst="rect">
@@ -576,7 +576,7 @@
         </p:nvSpPr>
         <p:spPr>
           <a:xfrm>
-            <a:off x="3372118" y="2768958"/>
+            <a:off x="1250710" y="2768958"/>
             <a:ext cx="5447763" cy="151327"/>
           </a:xfrm>
           <a:prstGeom prst="rect">
@@ -618,7 +618,7 @@
         </p:nvSpPr>
         <p:spPr>
           <a:xfrm>
-            <a:off x="3372118" y="2768958"/>
+            <a:off x="1250710" y="2768958"/>
             <a:ext cx="5447763" cy="151327"/>
           </a:xfrm>
           <a:prstGeom prst="rect">
@@ -660,7 +660,7 @@
         </p:nvSpPr>
         <p:spPr>
           <a:xfrm>
-            <a:off x="3372118" y="2920285"/>
+            <a:off x="1250710" y="2920285"/>
             <a:ext cx="5447763" cy="340485"/>
           </a:xfrm>
           <a:prstGeom prst="rect">
@@ -706,7 +706,7 @@
         </p:nvSpPr>
         <p:spPr>
           <a:xfrm>
-            <a:off x="3372118" y="3336433"/>
+            <a:off x="1250710" y="3336433"/>
             <a:ext cx="680970" cy="151327"/>
           </a:xfrm>
           <a:prstGeom prst="rect">
@@ -748,7 +748,7 @@
         </p:nvSpPr>
         <p:spPr>
           <a:xfrm>
-            <a:off x="3372118" y="3336433"/>
+            <a:off x="1250710" y="3336433"/>
             <a:ext cx="680970" cy="151327"/>
           </a:xfrm>
           <a:prstGeom prst="rect">
@@ -790,7 +790,7 @@
         </p:nvSpPr>
         <p:spPr>
           <a:xfrm>
-            <a:off x="3372118" y="3487760"/>
+            <a:off x="1250710" y="3487760"/>
             <a:ext cx="680970" cy="340485"/>
           </a:xfrm>
           <a:prstGeom prst="rect">
@@ -854,7 +854,7 @@
         </p:nvSpPr>
         <p:spPr>
           <a:xfrm>
-            <a:off x="4053089" y="3336433"/>
+            <a:off x="1931681" y="3336433"/>
             <a:ext cx="1021456" cy="151327"/>
           </a:xfrm>
           <a:prstGeom prst="rect">
@@ -896,7 +896,7 @@
         </p:nvSpPr>
         <p:spPr>
           <a:xfrm>
-            <a:off x="4053089" y="3336433"/>
+            <a:off x="1931681" y="3336433"/>
             <a:ext cx="1021456" cy="151327"/>
           </a:xfrm>
           <a:prstGeom prst="rect">
@@ -938,7 +938,7 @@
         </p:nvSpPr>
         <p:spPr>
           <a:xfrm>
-            <a:off x="4053089" y="3487760"/>
+            <a:off x="1931681" y="3487760"/>
             <a:ext cx="1021456" cy="340485"/>
           </a:xfrm>
           <a:prstGeom prst="rect">
@@ -984,7 +984,7 @@
         </p:nvSpPr>
         <p:spPr>
           <a:xfrm>
-            <a:off x="5074544" y="3336433"/>
+            <a:off x="2953136" y="3336433"/>
             <a:ext cx="240231" cy="151327"/>
           </a:xfrm>
           <a:prstGeom prst="rect">
@@ -1026,7 +1026,7 @@
         </p:nvSpPr>
         <p:spPr>
           <a:xfrm>
-            <a:off x="5074544" y="3487760"/>
+            <a:off x="2953136" y="3487760"/>
             <a:ext cx="170243" cy="340485"/>
           </a:xfrm>
           <a:prstGeom prst="rect">
@@ -1072,7 +1072,7 @@
         </p:nvSpPr>
         <p:spPr>
           <a:xfrm>
-            <a:off x="5244787" y="3336433"/>
+            <a:off x="3123379" y="3336433"/>
             <a:ext cx="240231" cy="151327"/>
           </a:xfrm>
           <a:prstGeom prst="rect">
@@ -1114,7 +1114,7 @@
         </p:nvSpPr>
         <p:spPr>
           <a:xfrm>
-            <a:off x="5244787" y="3487760"/>
+            <a:off x="3123379" y="3487760"/>
             <a:ext cx="170243" cy="340485"/>
           </a:xfrm>
           <a:prstGeom prst="rect">
@@ -1160,7 +1160,7 @@
         </p:nvSpPr>
         <p:spPr>
           <a:xfrm>
-            <a:off x="5415029" y="3336433"/>
+            <a:off x="3293621" y="3336433"/>
             <a:ext cx="240231" cy="151327"/>
           </a:xfrm>
           <a:prstGeom prst="rect">
@@ -1202,7 +1202,7 @@
         </p:nvSpPr>
         <p:spPr>
           <a:xfrm>
-            <a:off x="5415029" y="3487760"/>
+            <a:off x="3293621" y="3487760"/>
             <a:ext cx="170243" cy="340485"/>
           </a:xfrm>
           <a:prstGeom prst="rect">
@@ -1248,7 +1248,7 @@
         </p:nvSpPr>
         <p:spPr>
           <a:xfrm>
-            <a:off x="5585272" y="3336433"/>
+            <a:off x="3463864" y="3336433"/>
             <a:ext cx="240231" cy="151327"/>
           </a:xfrm>
           <a:prstGeom prst="rect">
@@ -1290,7 +1290,7 @@
         </p:nvSpPr>
         <p:spPr>
           <a:xfrm>
-            <a:off x="5585272" y="3487760"/>
+            <a:off x="3463864" y="3487760"/>
             <a:ext cx="170243" cy="340485"/>
           </a:xfrm>
           <a:prstGeom prst="rect">
@@ -1336,7 +1336,7 @@
         </p:nvSpPr>
         <p:spPr>
           <a:xfrm>
-            <a:off x="5755515" y="3336433"/>
+            <a:off x="3634107" y="3336433"/>
             <a:ext cx="240231" cy="151327"/>
           </a:xfrm>
           <a:prstGeom prst="rect">
@@ -1378,7 +1378,7 @@
         </p:nvSpPr>
         <p:spPr>
           <a:xfrm>
-            <a:off x="5755515" y="3487760"/>
+            <a:off x="3634107" y="3487760"/>
             <a:ext cx="170243" cy="340485"/>
           </a:xfrm>
           <a:prstGeom prst="rect">
@@ -1424,7 +1424,7 @@
         </p:nvSpPr>
         <p:spPr>
           <a:xfrm>
-            <a:off x="5925757" y="3336433"/>
+            <a:off x="3804349" y="3336433"/>
             <a:ext cx="240231" cy="151327"/>
           </a:xfrm>
           <a:prstGeom prst="rect">
@@ -1466,7 +1466,7 @@
         </p:nvSpPr>
         <p:spPr>
           <a:xfrm>
-            <a:off x="5925757" y="3487760"/>
+            <a:off x="3804349" y="3487760"/>
             <a:ext cx="170243" cy="340485"/>
           </a:xfrm>
           <a:prstGeom prst="rect">
@@ -1512,7 +1512,7 @@
         </p:nvSpPr>
         <p:spPr>
           <a:xfrm>
-            <a:off x="6096000" y="3336433"/>
+            <a:off x="3974592" y="3336433"/>
             <a:ext cx="2723882" cy="151327"/>
           </a:xfrm>
           <a:prstGeom prst="rect">
@@ -1554,7 +1554,7 @@
         </p:nvSpPr>
         <p:spPr>
           <a:xfrm>
-            <a:off x="6096000" y="3336433"/>
+            <a:off x="3974592" y="3336433"/>
             <a:ext cx="2723882" cy="151327"/>
           </a:xfrm>
           <a:prstGeom prst="rect">
@@ -1596,7 +1596,7 @@
         </p:nvSpPr>
         <p:spPr>
           <a:xfrm>
-            <a:off x="6096000" y="3487760"/>
+            <a:off x="3974592" y="3487760"/>
             <a:ext cx="2723882" cy="340485"/>
           </a:xfrm>
           <a:prstGeom prst="rect">
@@ -1642,7 +1642,7 @@
         </p:nvSpPr>
         <p:spPr>
           <a:xfrm>
-            <a:off x="3372118" y="3903908"/>
+            <a:off x="1250710" y="3903908"/>
             <a:ext cx="2723882" cy="151327"/>
           </a:xfrm>
           <a:prstGeom prst="rect">
@@ -1684,7 +1684,7 @@
         </p:nvSpPr>
         <p:spPr>
           <a:xfrm>
-            <a:off x="3372118" y="3903908"/>
+            <a:off x="1250710" y="3903908"/>
             <a:ext cx="2723882" cy="151327"/>
           </a:xfrm>
           <a:prstGeom prst="rect">
@@ -1726,7 +1726,7 @@
         </p:nvSpPr>
         <p:spPr>
           <a:xfrm>
-            <a:off x="3372118" y="4055235"/>
+            <a:off x="1250710" y="4055235"/>
             <a:ext cx="2723882" cy="340485"/>
           </a:xfrm>
           <a:prstGeom prst="rect">
@@ -1772,7 +1772,7 @@
         </p:nvSpPr>
         <p:spPr>
           <a:xfrm>
-            <a:off x="6096000" y="3903908"/>
+            <a:off x="3974592" y="3903908"/>
             <a:ext cx="2723882" cy="151327"/>
           </a:xfrm>
           <a:prstGeom prst="rect">
@@ -1814,7 +1814,7 @@
         </p:nvSpPr>
         <p:spPr>
           <a:xfrm>
-            <a:off x="6096000" y="3903908"/>
+            <a:off x="3974592" y="3903908"/>
             <a:ext cx="2723882" cy="151327"/>
           </a:xfrm>
           <a:prstGeom prst="rect">
@@ -1856,7 +1856,7 @@
         </p:nvSpPr>
         <p:spPr>
           <a:xfrm>
-            <a:off x="6096000" y="4055235"/>
+            <a:off x="3974592" y="4055235"/>
             <a:ext cx="2723882" cy="340485"/>
           </a:xfrm>
           <a:prstGeom prst="rect">
@@ -1902,7 +1902,7 @@
         </p:nvSpPr>
         <p:spPr>
           <a:xfrm>
-            <a:off x="3372118" y="4471384"/>
+            <a:off x="1250710" y="4471384"/>
             <a:ext cx="5447763" cy="151327"/>
           </a:xfrm>
           <a:prstGeom prst="rect">
@@ -1944,7 +1944,7 @@
         </p:nvSpPr>
         <p:spPr>
           <a:xfrm>
-            <a:off x="3372118" y="4471384"/>
+            <a:off x="1250710" y="4471384"/>
             <a:ext cx="5447763" cy="151327"/>
           </a:xfrm>
           <a:prstGeom prst="rect">
@@ -1986,7 +1986,7 @@
         </p:nvSpPr>
         <p:spPr>
           <a:xfrm>
-            <a:off x="3372118" y="4622711"/>
+            <a:off x="1250710" y="4622711"/>
             <a:ext cx="5447763" cy="340485"/>
           </a:xfrm>
           <a:prstGeom prst="rect">
@@ -2032,7 +2032,7 @@
         </p:nvSpPr>
         <p:spPr>
           <a:xfrm>
-            <a:off x="3372118" y="5038859"/>
+            <a:off x="1250710" y="5038859"/>
             <a:ext cx="5447763" cy="151327"/>
           </a:xfrm>
           <a:prstGeom prst="rect">
@@ -2074,7 +2074,7 @@
         </p:nvSpPr>
         <p:spPr>
           <a:xfrm>
-            <a:off x="3372118" y="5038859"/>
+            <a:off x="1250710" y="5038859"/>
             <a:ext cx="5447763" cy="151327"/>
           </a:xfrm>
           <a:prstGeom prst="rect">
@@ -2116,7 +2116,7 @@
         </p:nvSpPr>
         <p:spPr>
           <a:xfrm>
-            <a:off x="3372118" y="5190186"/>
+            <a:off x="1250710" y="5190186"/>
             <a:ext cx="5447763" cy="340485"/>
           </a:xfrm>
           <a:prstGeom prst="rect">
@@ -2162,7 +2162,7 @@
         </p:nvSpPr>
         <p:spPr>
           <a:xfrm>
-            <a:off x="3372118" y="5606335"/>
+            <a:off x="1250710" y="5606335"/>
             <a:ext cx="5447763" cy="151327"/>
           </a:xfrm>
           <a:prstGeom prst="rect">
@@ -2204,7 +2204,7 @@
         </p:nvSpPr>
         <p:spPr>
           <a:xfrm>
-            <a:off x="3372118" y="5606335"/>
+            <a:off x="1250710" y="5606335"/>
             <a:ext cx="5447763" cy="151327"/>
           </a:xfrm>
           <a:prstGeom prst="rect">
@@ -2246,7 +2246,7 @@
         </p:nvSpPr>
         <p:spPr>
           <a:xfrm>
-            <a:off x="3372118" y="5757661"/>
+            <a:off x="1250710" y="5757661"/>
             <a:ext cx="5447763" cy="340485"/>
           </a:xfrm>
           <a:prstGeom prst="rect">
@@ -2280,6 +2280,309 @@
                 </a:solidFill>
               </a:rPr>
               <a:t>Data (variable length)</a:t>
+            </a:r>
+          </a:p>
+        </p:txBody>
+      </p:sp>
+      <p:sp>
+        <p:nvSpPr>
+          <p:cNvPr id="4" name="Mermaid source"/>
+          <p:cNvSpPr/>
+          <p:nvPr/>
+        </p:nvSpPr>
+        <p:spPr>
+          <a:xfrm>
+            <a:off x="7674864" y="1028700"/>
+            <a:ext cx="4059936" cy="5372100"/>
+          </a:xfrm>
+          <a:prstGeom prst="rect">
+            <a:avLst/>
+          </a:prstGeom>
+          <a:solidFill>
+            <a:srgbClr val="F3F4F6"/>
+          </a:solidFill>
+          <a:ln w="9525">
+            <a:solidFill>
+              <a:srgbClr val="D1D5DB"/>
+            </a:solidFill>
+          </a:ln>
+        </p:spPr>
+        <p:txBody>
+          <a:bodyPr wrap="square" lIns="91440" tIns="45720" rIns="91440" bIns="45720" anchor="t">
+            <a:noAutofit/>
+          </a:bodyPr>
+          <a:lstStyle/>
+          <a:p>
+            <a:pPr algn="l"/>
+            <a:r>
+              <a:rPr lang="en-US" sz="1400" dirty="0">
+                <a:solidFill>
+                  <a:srgbClr val="1F2937"/>
+                </a:solidFill>
+                <a:latin typeface="Consolas"/>
+                <a:cs typeface="Consolas"/>
+              </a:rPr>
+              <a:t>---</a:t>
+            </a:r>
+          </a:p>
+          <a:p>
+            <a:pPr algn="l"/>
+            <a:r>
+              <a:rPr lang="en-US" sz="1400" dirty="0">
+                <a:solidFill>
+                  <a:srgbClr val="1F2937"/>
+                </a:solidFill>
+                <a:latin typeface="Consolas"/>
+                <a:cs typeface="Consolas"/>
+              </a:rPr>
+              <a:t>title: "TCP Packet"</a:t>
+            </a:r>
+          </a:p>
+          <a:p>
+            <a:pPr algn="l"/>
+            <a:r>
+              <a:rPr lang="en-US" sz="1400" dirty="0">
+                <a:solidFill>
+                  <a:srgbClr val="1F2937"/>
+                </a:solidFill>
+                <a:latin typeface="Consolas"/>
+                <a:cs typeface="Consolas"/>
+              </a:rPr>
+              <a:t>---</a:t>
+            </a:r>
+          </a:p>
+          <a:p>
+            <a:pPr algn="l"/>
+            <a:r>
+              <a:rPr lang="en-US" sz="1400" dirty="0">
+                <a:solidFill>
+                  <a:srgbClr val="1F2937"/>
+                </a:solidFill>
+                <a:latin typeface="Consolas"/>
+                <a:cs typeface="Consolas"/>
+              </a:rPr>
+              <a:t>packet</a:t>
+            </a:r>
+          </a:p>
+          <a:p>
+            <a:pPr algn="l"/>
+            <a:r>
+              <a:rPr lang="en-US" sz="1400" dirty="0">
+                <a:solidFill>
+                  <a:srgbClr val="1F2937"/>
+                </a:solidFill>
+                <a:latin typeface="Consolas"/>
+                <a:cs typeface="Consolas"/>
+              </a:rPr>
+              <a:t>0-15: "Source Port"</a:t>
+            </a:r>
+          </a:p>
+          <a:p>
+            <a:pPr algn="l"/>
+            <a:r>
+              <a:rPr lang="en-US" sz="1400" dirty="0">
+                <a:solidFill>
+                  <a:srgbClr val="1F2937"/>
+                </a:solidFill>
+                <a:latin typeface="Consolas"/>
+                <a:cs typeface="Consolas"/>
+              </a:rPr>
+              <a:t>16-31: "Destination Port"</a:t>
+            </a:r>
+          </a:p>
+          <a:p>
+            <a:pPr algn="l"/>
+            <a:r>
+              <a:rPr lang="en-US" sz="1400" dirty="0">
+                <a:solidFill>
+                  <a:srgbClr val="1F2937"/>
+                </a:solidFill>
+                <a:latin typeface="Consolas"/>
+                <a:cs typeface="Consolas"/>
+              </a:rPr>
+              <a:t>32-63: "Sequence Number"</a:t>
+            </a:r>
+          </a:p>
+          <a:p>
+            <a:pPr algn="l"/>
+            <a:r>
+              <a:rPr lang="en-US" sz="1400" dirty="0">
+                <a:solidFill>
+                  <a:srgbClr val="1F2937"/>
+                </a:solidFill>
+                <a:latin typeface="Consolas"/>
+                <a:cs typeface="Consolas"/>
+              </a:rPr>
+              <a:t>64-95: "Acknowledgment Number"</a:t>
+            </a:r>
+          </a:p>
+          <a:p>
+            <a:pPr algn="l"/>
+            <a:r>
+              <a:rPr lang="en-US" sz="1400" dirty="0">
+                <a:solidFill>
+                  <a:srgbClr val="1F2937"/>
+                </a:solidFill>
+                <a:latin typeface="Consolas"/>
+                <a:cs typeface="Consolas"/>
+              </a:rPr>
+              <a:t>96-99: "Data Offset"</a:t>
+            </a:r>
+          </a:p>
+          <a:p>
+            <a:pPr algn="l"/>
+            <a:r>
+              <a:rPr lang="en-US" sz="1400" dirty="0">
+                <a:solidFill>
+                  <a:srgbClr val="1F2937"/>
+                </a:solidFill>
+                <a:latin typeface="Consolas"/>
+                <a:cs typeface="Consolas"/>
+              </a:rPr>
+              <a:t>100-105: "Reserved"</a:t>
+            </a:r>
+          </a:p>
+          <a:p>
+            <a:pPr algn="l"/>
+            <a:r>
+              <a:rPr lang="en-US" sz="1400" dirty="0">
+                <a:solidFill>
+                  <a:srgbClr val="1F2937"/>
+                </a:solidFill>
+                <a:latin typeface="Consolas"/>
+                <a:cs typeface="Consolas"/>
+              </a:rPr>
+              <a:t>106: "URG"</a:t>
+            </a:r>
+          </a:p>
+          <a:p>
+            <a:pPr algn="l"/>
+            <a:r>
+              <a:rPr lang="en-US" sz="1400" dirty="0">
+                <a:solidFill>
+                  <a:srgbClr val="1F2937"/>
+                </a:solidFill>
+                <a:latin typeface="Consolas"/>
+                <a:cs typeface="Consolas"/>
+              </a:rPr>
+              <a:t>107: "ACK"</a:t>
+            </a:r>
+          </a:p>
+          <a:p>
+            <a:pPr algn="l"/>
+            <a:r>
+              <a:rPr lang="en-US" sz="1400" dirty="0">
+                <a:solidFill>
+                  <a:srgbClr val="1F2937"/>
+                </a:solidFill>
+                <a:latin typeface="Consolas"/>
+                <a:cs typeface="Consolas"/>
+              </a:rPr>
+              <a:t>108: "PSH"</a:t>
+            </a:r>
+          </a:p>
+          <a:p>
+            <a:pPr algn="l"/>
+            <a:r>
+              <a:rPr lang="en-US" sz="1400" dirty="0">
+                <a:solidFill>
+                  <a:srgbClr val="1F2937"/>
+                </a:solidFill>
+                <a:latin typeface="Consolas"/>
+                <a:cs typeface="Consolas"/>
+              </a:rPr>
+              <a:t>109: "RST"</a:t>
+            </a:r>
+          </a:p>
+          <a:p>
+            <a:pPr algn="l"/>
+            <a:r>
+              <a:rPr lang="en-US" sz="1400" dirty="0">
+                <a:solidFill>
+                  <a:srgbClr val="1F2937"/>
+                </a:solidFill>
+                <a:latin typeface="Consolas"/>
+                <a:cs typeface="Consolas"/>
+              </a:rPr>
+              <a:t>110: "SYN"</a:t>
+            </a:r>
+          </a:p>
+          <a:p>
+            <a:pPr algn="l"/>
+            <a:r>
+              <a:rPr lang="en-US" sz="1400" dirty="0">
+                <a:solidFill>
+                  <a:srgbClr val="1F2937"/>
+                </a:solidFill>
+                <a:latin typeface="Consolas"/>
+                <a:cs typeface="Consolas"/>
+              </a:rPr>
+              <a:t>111: "FIN"</a:t>
+            </a:r>
+          </a:p>
+          <a:p>
+            <a:pPr algn="l"/>
+            <a:r>
+              <a:rPr lang="en-US" sz="1400" dirty="0">
+                <a:solidFill>
+                  <a:srgbClr val="1F2937"/>
+                </a:solidFill>
+                <a:latin typeface="Consolas"/>
+                <a:cs typeface="Consolas"/>
+              </a:rPr>
+              <a:t>112-127: "Window"</a:t>
+            </a:r>
+          </a:p>
+          <a:p>
+            <a:pPr algn="l"/>
+            <a:r>
+              <a:rPr lang="en-US" sz="1400" dirty="0">
+                <a:solidFill>
+                  <a:srgbClr val="1F2937"/>
+                </a:solidFill>
+                <a:latin typeface="Consolas"/>
+                <a:cs typeface="Consolas"/>
+              </a:rPr>
+              <a:t>128-143: "Checksum"</a:t>
+            </a:r>
+          </a:p>
+          <a:p>
+            <a:pPr algn="l"/>
+            <a:r>
+              <a:rPr lang="en-US" sz="1400" dirty="0">
+                <a:solidFill>
+                  <a:srgbClr val="1F2937"/>
+                </a:solidFill>
+                <a:latin typeface="Consolas"/>
+                <a:cs typeface="Consolas"/>
+              </a:rPr>
+              <a:t>144-159: "Urgent Pointer"</a:t>
+            </a:r>
+          </a:p>
+          <a:p>
+            <a:pPr algn="l"/>
+            <a:r>
+              <a:rPr lang="en-US" sz="1400" dirty="0">
+                <a:solidFill>
+                  <a:srgbClr val="1F2937"/>
+                </a:solidFill>
+                <a:latin typeface="Consolas"/>
+                <a:cs typeface="Consolas"/>
+              </a:rPr>
+              <a:t>160-191: "(Options and Padding)"</a:t>
+            </a:r>
+          </a:p>
+          <a:p>
+            <a:pPr algn="l"/>
+            <a:r>
+              <a:rPr lang="en-US" sz="1400" dirty="0">
+                <a:solidFill>
+                  <a:srgbClr val="1F2937"/>
+                </a:solidFill>
+                <a:latin typeface="Consolas"/>
+                <a:cs typeface="Consolas"/>
+              </a:rPr>
+              <a:t>192-255: "Data (variable length)"</a:t>
             </a:r>
           </a:p>
         </p:txBody>
